--- a/3.4 Hoofdstuk 4 - Internationale markten/3.4.3 Paragraaf 3 - Intra-industriele handel/2. Leren/3.4.3 Intra-industriele handel – presentatie.pptx
+++ b/3.4 Hoofdstuk 4 - Internationale markten/3.4.3 Paragraaf 3 - Intra-industriele handel/2. Leren/3.4.3 Intra-industriele handel – presentatie.pptx
@@ -2057,6 +2057,8 @@
               </a:rPr>
               <a:t>Intra-industriële handel = dezelfde producten importeren én exporteren</a:t>
             </a:r>
+          </a:p>
+          <a:p>
             <a:pPr algn="l" marL="342900" indent="-342900">
               <a:lnSpc>
                 <a:spcPct val="160000"/>
@@ -2078,6 +2080,8 @@
               </a:rPr>
               <a:t>Comparatief voordeel verklaart dit niet — andere oorzaken nodig</a:t>
             </a:r>
+          </a:p>
+          <a:p>
             <a:pPr algn="l" marL="342900" indent="-342900">
               <a:lnSpc>
                 <a:spcPct val="160000"/>
@@ -2099,6 +2103,8 @@
               </a:rPr>
               <a:t>Drie factoren: productdifferentiatie, schaalvoordelen, lage transactiekosten</a:t>
             </a:r>
+          </a:p>
+          <a:p>
             <a:pPr algn="l" marL="342900" indent="-342900">
               <a:lnSpc>
                 <a:spcPct val="160000"/>
@@ -2120,6 +2126,8 @@
               </a:rPr>
               <a:t>Buitenlandse toetreding (duopolie) → lagere prijs, hoger CS, meer doelmatigheid</a:t>
             </a:r>
+          </a:p>
+          <a:p>
             <a:pPr algn="l" marL="342900" indent="-342900">
               <a:lnSpc>
                 <a:spcPct val="160000"/>
@@ -2141,7 +2149,6 @@
               </a:rPr>
               <a:t>De euro stimuleert intra-handel door lagere kosten en transparantie</a:t>
             </a:r>
-            <a:endParaRPr lang="en-US" sz="1500" dirty="0"/>
           </a:p>
         </p:txBody>
       </p:sp>
@@ -2290,6 +2297,8 @@
               </a:rPr>
               <a:t>Het verschil uitleggen tussen intra- en inter-industriële handel</a:t>
             </a:r>
+          </a:p>
+          <a:p>
             <a:pPr algn="l" marL="342900" indent="-342900">
               <a:lnSpc>
                 <a:spcPct val="150000"/>
@@ -2311,6 +2320,8 @@
               </a:rPr>
               <a:t>Uitleggen waarom comparatief voordeel intra-handel niet verklaart</a:t>
             </a:r>
+          </a:p>
+          <a:p>
             <a:pPr algn="l" marL="342900" indent="-342900">
               <a:lnSpc>
                 <a:spcPct val="150000"/>
@@ -2332,6 +2343,8 @@
               </a:rPr>
               <a:t>Drie factoren noemen die intra-industriële handel stimuleren</a:t>
             </a:r>
+          </a:p>
+          <a:p>
             <a:pPr algn="l" marL="342900" indent="-342900">
               <a:lnSpc>
                 <a:spcPct val="150000"/>
@@ -2353,6 +2366,8 @@
               </a:rPr>
               <a:t>Monopolie vs. Cournotduopolie: prijs, hoeveelheid en welvaart vergelijken</a:t>
             </a:r>
+          </a:p>
+          <a:p>
             <a:pPr algn="l" marL="342900" indent="-342900">
               <a:lnSpc>
                 <a:spcPct val="150000"/>
@@ -2374,7 +2389,6 @@
               </a:rPr>
               <a:t>Het effect van de euro op intra-industriële handel verklaren</a:t>
             </a:r>
-            <a:endParaRPr lang="en-US" sz="1500" dirty="0"/>
           </a:p>
         </p:txBody>
       </p:sp>
@@ -2470,6 +2484,10 @@
             </a:outerShdw>
           </a:effectLst>
         </p:spPr>
+        <p:txBody>
+          <a:bodyPr/>
+          <a:p/>
+        </p:txBody>
       </p:sp>
       <p:sp>
         <p:nvSpPr>
@@ -2490,6 +2508,10 @@
           </a:solidFill>
           <a:ln/>
         </p:spPr>
+        <p:txBody>
+          <a:bodyPr/>
+          <a:p/>
+        </p:txBody>
       </p:sp>
       <p:sp>
         <p:nvSpPr>
@@ -2732,6 +2754,10 @@
             </a:outerShdw>
           </a:effectLst>
         </p:spPr>
+        <p:txBody>
+          <a:bodyPr/>
+          <a:p/>
+        </p:txBody>
       </p:sp>
       <p:sp>
         <p:nvSpPr>
@@ -2752,6 +2778,10 @@
           </a:solidFill>
           <a:ln/>
         </p:spPr>
+        <p:txBody>
+          <a:bodyPr/>
+          <a:p/>
+        </p:txBody>
       </p:sp>
       <p:sp>
         <p:nvSpPr>
@@ -3080,6 +3110,10 @@
             </a:outerShdw>
           </a:effectLst>
         </p:spPr>
+        <p:txBody>
+          <a:bodyPr/>
+          <a:p/>
+        </p:txBody>
       </p:sp>
       <p:sp>
         <p:nvSpPr>
@@ -3192,6 +3226,10 @@
             </a:outerShdw>
           </a:effectLst>
         </p:spPr>
+        <p:txBody>
+          <a:bodyPr/>
+          <a:p/>
+        </p:txBody>
       </p:sp>
       <p:sp>
         <p:nvSpPr>
@@ -3304,6 +3342,10 @@
             </a:outerShdw>
           </a:effectLst>
         </p:spPr>
+        <p:txBody>
+          <a:bodyPr/>
+          <a:p/>
+        </p:txBody>
       </p:sp>
       <p:sp>
         <p:nvSpPr>
@@ -3416,6 +3458,10 @@
             </a:outerShdw>
           </a:effectLst>
         </p:spPr>
+        <p:txBody>
+          <a:bodyPr/>
+          <a:p/>
+        </p:txBody>
       </p:sp>
       <p:sp>
         <p:nvSpPr>
@@ -3528,6 +3574,10 @@
             </a:outerShdw>
           </a:effectLst>
         </p:spPr>
+        <p:txBody>
+          <a:bodyPr/>
+          <a:p/>
+        </p:txBody>
       </p:sp>
       <p:sp>
         <p:nvSpPr>
@@ -3651,6 +3701,10 @@
           </a:solidFill>
           <a:ln/>
         </p:spPr>
+        <p:txBody>
+          <a:bodyPr/>
+          <a:p/>
+        </p:txBody>
       </p:sp>
       <p:sp>
         <p:nvSpPr>
@@ -3719,6 +3773,10 @@
             </a:outerShdw>
           </a:effectLst>
         </p:spPr>
+        <p:txBody>
+          <a:bodyPr/>
+          <a:p/>
+        </p:txBody>
       </p:sp>
       <p:sp>
         <p:nvSpPr>
@@ -3739,6 +3797,10 @@
           </a:solidFill>
           <a:ln/>
         </p:spPr>
+        <p:txBody>
+          <a:bodyPr/>
+          <a:p/>
+        </p:txBody>
       </p:sp>
       <p:sp>
         <p:nvSpPr>
@@ -3837,6 +3899,10 @@
           </a:solidFill>
           <a:ln/>
         </p:spPr>
+        <p:txBody>
+          <a:bodyPr/>
+          <a:p/>
+        </p:txBody>
       </p:sp>
       <p:sp>
         <p:nvSpPr>
@@ -3905,6 +3971,10 @@
             </a:outerShdw>
           </a:effectLst>
         </p:spPr>
+        <p:txBody>
+          <a:bodyPr/>
+          <a:p/>
+        </p:txBody>
       </p:sp>
       <p:sp>
         <p:nvSpPr>
@@ -3925,6 +3995,10 @@
           </a:solidFill>
           <a:ln/>
         </p:spPr>
+        <p:txBody>
+          <a:bodyPr/>
+          <a:p/>
+        </p:txBody>
       </p:sp>
       <p:sp>
         <p:nvSpPr>
@@ -4023,6 +4097,10 @@
           </a:solidFill>
           <a:ln/>
         </p:spPr>
+        <p:txBody>
+          <a:bodyPr/>
+          <a:p/>
+        </p:txBody>
       </p:sp>
       <p:sp>
         <p:nvSpPr>
@@ -4091,6 +4169,10 @@
             </a:outerShdw>
           </a:effectLst>
         </p:spPr>
+        <p:txBody>
+          <a:bodyPr/>
+          <a:p/>
+        </p:txBody>
       </p:sp>
       <p:sp>
         <p:nvSpPr>
@@ -4111,6 +4193,10 @@
           </a:solidFill>
           <a:ln/>
         </p:spPr>
+        <p:txBody>
+          <a:bodyPr/>
+          <a:p/>
+        </p:txBody>
       </p:sp>
       <p:sp>
         <p:nvSpPr>
@@ -4282,6 +4368,10 @@
             </a:outerShdw>
           </a:effectLst>
         </p:spPr>
+        <p:txBody>
+          <a:bodyPr/>
+          <a:p/>
+        </p:txBody>
       </p:sp>
       <p:sp>
         <p:nvSpPr>
@@ -4302,6 +4392,10 @@
           </a:solidFill>
           <a:ln/>
         </p:spPr>
+        <p:txBody>
+          <a:bodyPr/>
+          <a:p/>
+        </p:txBody>
       </p:sp>
       <p:sp>
         <p:nvSpPr>
@@ -4557,6 +4651,10 @@
             </a:outerShdw>
           </a:effectLst>
         </p:spPr>
+        <p:txBody>
+          <a:bodyPr/>
+          <a:p/>
+        </p:txBody>
       </p:sp>
       <p:sp>
         <p:nvSpPr>
@@ -4577,6 +4675,10 @@
           </a:solidFill>
           <a:ln/>
         </p:spPr>
+        <p:txBody>
+          <a:bodyPr/>
+          <a:p/>
+        </p:txBody>
       </p:sp>
       <p:sp>
         <p:nvSpPr>
@@ -4825,6 +4927,10 @@
           </a:solidFill>
           <a:ln/>
         </p:spPr>
+        <p:txBody>
+          <a:bodyPr/>
+          <a:p/>
+        </p:txBody>
       </p:sp>
       <p:sp>
         <p:nvSpPr>
@@ -4845,6 +4951,10 @@
           </a:solidFill>
           <a:ln/>
         </p:spPr>
+        <p:txBody>
+          <a:bodyPr/>
+          <a:p/>
+        </p:txBody>
       </p:sp>
       <p:sp>
         <p:nvSpPr>
@@ -4975,6 +5085,10 @@
             <a:prstDash val="solid"/>
           </a:ln>
         </p:spPr>
+        <p:txBody>
+          <a:bodyPr/>
+          <a:p/>
+        </p:txBody>
       </p:sp>
       <p:sp>
         <p:nvSpPr>
@@ -4995,6 +5109,10 @@
           </a:solidFill>
           <a:ln/>
         </p:spPr>
+        <p:txBody>
+          <a:bodyPr/>
+          <a:p/>
+        </p:txBody>
       </p:sp>
       <p:sp>
         <p:nvSpPr>
@@ -5280,6 +5398,10 @@
             </a:outerShdw>
           </a:effectLst>
         </p:spPr>
+        <p:txBody>
+          <a:bodyPr/>
+          <a:p/>
+        </p:txBody>
       </p:sp>
       <p:sp>
         <p:nvSpPr>
@@ -5300,6 +5422,10 @@
           </a:solidFill>
           <a:ln/>
         </p:spPr>
+        <p:txBody>
+          <a:bodyPr/>
+          <a:p/>
+        </p:txBody>
       </p:sp>
       <p:sp>
         <p:nvSpPr>
@@ -5513,6 +5639,10 @@
             </a:outerShdw>
           </a:effectLst>
         </p:spPr>
+        <p:txBody>
+          <a:bodyPr/>
+          <a:p/>
+        </p:txBody>
       </p:sp>
       <p:sp>
         <p:nvSpPr>
@@ -5667,6 +5797,10 @@
             </a:outerShdw>
           </a:effectLst>
         </p:spPr>
+        <p:txBody>
+          <a:bodyPr/>
+          <a:p/>
+        </p:txBody>
       </p:sp>
       <p:sp>
         <p:nvSpPr>
@@ -5779,6 +5913,10 @@
             </a:outerShdw>
           </a:effectLst>
         </p:spPr>
+        <p:txBody>
+          <a:bodyPr/>
+          <a:p/>
+        </p:txBody>
       </p:sp>
       <p:sp>
         <p:nvSpPr>
@@ -5905,6 +6043,10 @@
             </a:outerShdw>
           </a:effectLst>
         </p:spPr>
+        <p:txBody>
+          <a:bodyPr/>
+          <a:p/>
+        </p:txBody>
       </p:sp>
       <p:sp>
         <p:nvSpPr>
@@ -6031,6 +6173,10 @@
             </a:outerShdw>
           </a:effectLst>
         </p:spPr>
+        <p:txBody>
+          <a:bodyPr/>
+          <a:p/>
+        </p:txBody>
       </p:sp>
       <p:sp>
         <p:nvSpPr>
@@ -6157,6 +6303,10 @@
             </a:outerShdw>
           </a:effectLst>
         </p:spPr>
+        <p:txBody>
+          <a:bodyPr/>
+          <a:p/>
+        </p:txBody>
       </p:sp>
       <p:sp>
         <p:nvSpPr>
@@ -6225,6 +6375,10 @@
             </a:outerShdw>
           </a:effectLst>
         </p:spPr>
+        <p:txBody>
+          <a:bodyPr/>
+          <a:p/>
+        </p:txBody>
       </p:sp>
       <p:sp>
         <p:nvSpPr>
@@ -6245,6 +6399,10 @@
           </a:solidFill>
           <a:ln/>
         </p:spPr>
+        <p:txBody>
+          <a:bodyPr/>
+          <a:p/>
+        </p:txBody>
       </p:sp>
       <p:sp>
         <p:nvSpPr>
@@ -6487,6 +6645,10 @@
             </a:outerShdw>
           </a:effectLst>
         </p:spPr>
+        <p:txBody>
+          <a:bodyPr/>
+          <a:p/>
+        </p:txBody>
       </p:sp>
       <p:sp>
         <p:nvSpPr>
@@ -6507,6 +6669,10 @@
           </a:solidFill>
           <a:ln/>
         </p:spPr>
+        <p:txBody>
+          <a:bodyPr/>
+          <a:p/>
+        </p:txBody>
       </p:sp>
       <p:sp>
         <p:nvSpPr>
@@ -6614,6 +6780,10 @@
             </a:outerShdw>
           </a:effectLst>
         </p:spPr>
+        <p:txBody>
+          <a:bodyPr/>
+          <a:p/>
+        </p:txBody>
       </p:sp>
       <p:sp>
         <p:nvSpPr>
@@ -6634,6 +6804,10 @@
           </a:solidFill>
           <a:ln/>
         </p:spPr>
+        <p:txBody>
+          <a:bodyPr/>
+          <a:p/>
+        </p:txBody>
       </p:sp>
       <p:sp>
         <p:nvSpPr>
@@ -6741,6 +6915,10 @@
             </a:outerShdw>
           </a:effectLst>
         </p:spPr>
+        <p:txBody>
+          <a:bodyPr/>
+          <a:p/>
+        </p:txBody>
       </p:sp>
       <p:sp>
         <p:nvSpPr>
@@ -6761,6 +6939,10 @@
           </a:solidFill>
           <a:ln/>
         </p:spPr>
+        <p:txBody>
+          <a:bodyPr/>
+          <a:p/>
+        </p:txBody>
       </p:sp>
       <p:sp>
         <p:nvSpPr>
